--- a/curso_es/pptx/S28.pptx
+++ b/curso_es/pptx/S28.pptx
@@ -4108,7 +4108,7 @@
                 </a:solidFill>
                 <a:latin typeface="Nunito Sans"/>
               </a:rPr>
-              <a:t>Yasmin quiere unas zapatillas de 150 euros: «Las lleva toda la clase».</a:t>
+              <a:t>Una chica quiere unas zapatillas de 150 euros: «Las lleva toda la clase».</a:t>
             </a:r>
           </a:p>
         </p:txBody>
@@ -4417,7 +4417,7 @@
                 </a:solidFill>
                 <a:latin typeface="Nunito Sans"/>
               </a:rPr>
-              <a:t>Aitor busca dónde comer en Aste Nagusia. Un bar tiene 2.000 opiniones y casi todas dicen que se come bien (ejemplo inventado).</a:t>
+              <a:t>Un chico busca dónde comer en Aste Nagusia. Un bar tiene 2.000 opiniones y casi todas dicen que se come bien (ejemplo inventado).</a:t>
             </a:r>
           </a:p>
         </p:txBody>
@@ -4726,7 +4726,7 @@
                 </a:solidFill>
                 <a:latin typeface="Nunito Sans"/>
               </a:rPr>
-              <a:t>Leire llega a Londres y pregunta a su prima por qué lado van los coches. La prima: «Por la izquierda: aquí lo hace todo el mundo».</a:t>
+              <a:t>Una chica llega a Londres y pregunta a su prima por qué lado van los coches. La prima: «Por la izquierda: aquí lo hace todo el mundo».</a:t>
             </a:r>
           </a:p>
         </p:txBody>
@@ -4824,7 +4824,7 @@
                 </a:solidFill>
                 <a:latin typeface="Nunito Sans"/>
               </a:rPr>
-              <a:t>Pero Leire no pregunta qué es verdad sobre el mundo ni qué está bien. Pregunta cuál es la costumbre.</a:t>
+              <a:t>Pero esa chica no pregunta qué es verdad sobre el mundo ni qué está bien. Pregunta cuál es la costumbre.</a:t>
             </a:r>
           </a:p>
           <a:p>
